--- a/skills/presentations/assets/pptx/examples/04-benefit-value.pptx
+++ b/skills/presentations/assets/pptx/examples/04-benefit-value.pptx
@@ -5,16 +5,16 @@
     <p:sldMasterId xmlns:r="http://schemas.openxmlformats.org/officeDocument/2006/relationships" id="2147483648" r:id="rId1"/>
   </p:sldMasterIdLst>
   <p:notesMasterIdLst>
-    <p:notesMasterId r:id="R579da9505747439d"/>
+    <p:notesMasterId r:id="R79d253e83d2e4c89"/>
   </p:notesMasterIdLst>
   <p:sldIdLst>
-    <p:sldId id="256" r:id="R3138b93f0eaf45df"/>
-    <p:sldId id="257" r:id="R51892287d90d46ea"/>
-    <p:sldId id="258" r:id="R371cbe98614a4de6"/>
-    <p:sldId id="259" r:id="R30d850b68c2e4507"/>
-    <p:sldId id="260" r:id="R8e62ff5391224fc2"/>
-    <p:sldId id="261" r:id="R2383d584a0174275"/>
-    <p:sldId id="262" r:id="R32ce80d5fc064585"/>
+    <p:sldId id="256" r:id="Rc20e8880d84046d9"/>
+    <p:sldId id="257" r:id="R9db4303f31104caf"/>
+    <p:sldId id="258" r:id="Rd91c870a7a4f4575"/>
+    <p:sldId id="259" r:id="R6ff9ad4b802741f8"/>
+    <p:sldId id="260" r:id="R1f5c475af404479d"/>
+    <p:sldId id="261" r:id="Rff24c1538e534da6"/>
+    <p:sldId id="262" r:id="R4bad5196bc0f4c19"/>
   </p:sldIdLst>
   <p:sldSz cx="12192000" cy="6858000"/>
   <p:notesSz cx="6858000" cy="9144000"/>
@@ -1406,6 +1406,30 @@
                 <a:latin typeface="Calibri"/>
                 <a:ea typeface="Calibri"/>
               </a:rPr>
+              <a:t>Presentation window: ~2026-05-25 (after freeze 4/10 and day-3 boot 5/15).</a:t>
+            </a:r>
+          </a:p>
+          <a:p xmlns:a="http://schemas.openxmlformats.org/drawingml/2006/main">
+            <a:r>
+              <a:rPr lang="en-US" sz="1600" b="0">
+                <a:solidFill>
+                  <a:srgbClr val="1A202C"/>
+                </a:solidFill>
+                <a:latin typeface="Calibri"/>
+                <a:ea typeface="Calibri"/>
+              </a:rPr>
+              <a:t/>
+            </a:r>
+          </a:p>
+          <a:p xmlns:a="http://schemas.openxmlformats.org/drawingml/2006/main">
+            <a:r>
+              <a:rPr lang="en-US" sz="1600" b="0">
+                <a:solidFill>
+                  <a:srgbClr val="1A202C"/>
+                </a:solidFill>
+                <a:latin typeface="Calibri"/>
+                <a:ea typeface="Calibri"/>
+              </a:rPr>
               <a:t>Investment: 1.5 eng-q build + $180K/yr licenses (example dollars).</a:t>
             </a:r>
           </a:p>
@@ -1454,7 +1478,7 @@
                 <a:latin typeface="Calibri"/>
                 <a:ea typeface="Calibri"/>
               </a:rPr>
-              <a:t>Ask: expand seat pool +20 for H2 multi-program use.</a:t>
+              <a:t>Ask: expand seat pool +20 for H2 multi-program use (decide by 2026-05-30).</a:t>
             </a:r>
           </a:p>
         </p:txBody>
@@ -1744,7 +1768,7 @@
                 <a:latin typeface="Calibri"/>
                 <a:ea typeface="Calibri"/>
               </a:rPr>
-              <a:t>Leading metric: median regression 6h (n=12 weeks).</a:t>
+              <a:t>Leading metric: median regression 6h (n=12 weeks through 2026-05-20).</a:t>
             </a:r>
           </a:p>
           <a:p xmlns:a="http://schemas.openxmlformats.org/drawingml/2006/main">
@@ -1756,7 +1780,7 @@
                 <a:latin typeface="Calibri"/>
                 <a:ea typeface="Calibri"/>
               </a:rPr>
-              <a:t>Lagging: freeze held 6/20; day-3 boot.</a:t>
+              <a:t>Lagging (already realized before this deck): RTL freeze held 2026-04-10; day-3 boot 2026-05-15.</a:t>
             </a:r>
           </a:p>
         </p:txBody>
@@ -2596,7 +2620,7 @@
                 <a:latin typeface="Calibri"/>
                 <a:ea typeface="Calibri"/>
               </a:rPr>
-              <a:t>By: 2026-05-30 finance window.</a:t>
+              <a:t>By: 2026-05-30 finance window (after this 5/25 readout; before H2 planning).</a:t>
             </a:r>
           </a:p>
           <a:p xmlns:a="http://schemas.openxmlformats.org/drawingml/2006/main">
@@ -2609,6 +2633,18 @@
                 <a:ea typeface="Calibri"/>
               </a:rPr>
               <a:t>Assumption sheet: DOC-FARM-ROI-04.</a:t>
+            </a:r>
+          </a:p>
+          <a:p xmlns:a="http://schemas.openxmlformats.org/drawingml/2006/main">
+            <a:r>
+              <a:rPr lang="en-US" sz="1700" b="0">
+                <a:solidFill>
+                  <a:srgbClr val="1A202C"/>
+                </a:solidFill>
+                <a:latin typeface="Calibri"/>
+                <a:ea typeface="Calibri"/>
+              </a:rPr>
+              <a:t>Note: lagging KPIs (4/10 freeze, 5/15 boot) pre-date the ask deadline.</a:t>
             </a:r>
           </a:p>
         </p:txBody>

--- a/skills/presentations/assets/pptx/examples/04-benefit-value.pptx
+++ b/skills/presentations/assets/pptx/examples/04-benefit-value.pptx
@@ -5,16 +5,17 @@
     <p:sldMasterId xmlns:r="http://schemas.openxmlformats.org/officeDocument/2006/relationships" id="2147483648" r:id="rId1"/>
   </p:sldMasterIdLst>
   <p:notesMasterIdLst>
-    <p:notesMasterId r:id="R79d253e83d2e4c89"/>
+    <p:notesMasterId r:id="Rf5f381d27c43438a"/>
   </p:notesMasterIdLst>
   <p:sldIdLst>
-    <p:sldId id="256" r:id="Rc20e8880d84046d9"/>
-    <p:sldId id="257" r:id="R9db4303f31104caf"/>
-    <p:sldId id="258" r:id="Rd91c870a7a4f4575"/>
-    <p:sldId id="259" r:id="R6ff9ad4b802741f8"/>
-    <p:sldId id="260" r:id="R1f5c475af404479d"/>
-    <p:sldId id="261" r:id="Rff24c1538e534da6"/>
-    <p:sldId id="262" r:id="R4bad5196bc0f4c19"/>
+    <p:sldId id="256" r:id="Rdfbf30943bc04779"/>
+    <p:sldId id="257" r:id="Rd28cbeca0b674d49"/>
+    <p:sldId id="258" r:id="R51b944d86b404645"/>
+    <p:sldId id="259" r:id="R3ae50cea2c9b4248"/>
+    <p:sldId id="260" r:id="Rc69f3dfdac6448c4"/>
+    <p:sldId id="261" r:id="R2b964038a3074da1"/>
+    <p:sldId id="262" r:id="R7dcf2a710bcd4453"/>
+    <p:sldId id="263" r:id="R161fab1e3ade4960"/>
   </p:sldIdLst>
   <p:sldSz cx="12192000" cy="6858000"/>
   <p:notesSz cx="6858000" cy="9144000"/>
@@ -480,6 +481,30 @@
               <a:t>Cover (example). DV farm ROI → expand seats for H2 multi-program.</a:t>
             </a:r>
           </a:p>
+          <a:p xmlns:a="http://schemas.openxmlformats.org/drawingml/2006/main">
+            <a:r>
+              <a:rPr lang="en-US"/>
+              <a:t/>
+            </a:r>
+          </a:p>
+          <a:p xmlns:a="http://schemas.openxmlformats.org/drawingml/2006/main">
+            <a:r>
+              <a:rPr lang="en-US"/>
+              <a:t>Platform / shared infra investment impact chain</a:t>
+            </a:r>
+          </a:p>
+          <a:p xmlns:a="http://schemas.openxmlformats.org/drawingml/2006/main">
+            <a:r>
+              <a:rPr lang="en-US"/>
+              <a:t>EM Tools — executive communication / impact framing: https://www.em-tools.io/engineering-manager-responsibilities/executive-communication</a:t>
+            </a:r>
+          </a:p>
+          <a:p xmlns:a="http://schemas.openxmlformats.org/drawingml/2006/main">
+            <a:r>
+              <a:rPr lang="en-US"/>
+              <a:t>StaffEng — strategy as leverage (not ticket dumps): https://staffeng.com/guides/engineering-strategy/</a:t>
+            </a:r>
+          </a:p>
         </p:txBody>
       </p:sp>
     </p:spTree>
@@ -532,7 +557,19 @@
           <a:p xmlns:a="http://schemas.openxmlformats.org/drawingml/2006/main">
             <a:r>
               <a:rPr lang="en-US"/>
-              <a:t>Portfolio decision with labeled assumptions.</a:t>
+              <a:t>Platform / shared infra investment impact chain</a:t>
+            </a:r>
+          </a:p>
+          <a:p xmlns:a="http://schemas.openxmlformats.org/drawingml/2006/main">
+            <a:r>
+              <a:rPr lang="en-US"/>
+              <a:t>EM Tools — executive communication / impact framing: https://www.em-tools.io/engineering-manager-responsibilities/executive-communication</a:t>
+            </a:r>
+          </a:p>
+          <a:p xmlns:a="http://schemas.openxmlformats.org/drawingml/2006/main">
+            <a:r>
+              <a:rPr lang="en-US"/>
+              <a:t>StaffEng — strategy as leverage (not ticket dumps): https://staffeng.com/guides/engineering-strategy/</a:t>
             </a:r>
           </a:p>
         </p:txBody>
@@ -587,7 +624,7 @@
           <a:p xmlns:a="http://schemas.openxmlformats.org/drawingml/2006/main">
             <a:r>
               <a:rPr lang="en-US"/>
-              <a:t>Schedule = money on spin.</a:t>
+              <a:t>Portfolio decision with labeled assumptions.</a:t>
             </a:r>
           </a:p>
         </p:txBody>
@@ -642,7 +679,7 @@
           <a:p xmlns:a="http://schemas.openxmlformats.org/drawingml/2006/main">
             <a:r>
               <a:rPr lang="en-US"/>
-              <a:t>Causal language carefully: farm contributed; not sole cause.</a:t>
+              <a:t>Schedule = money on spin.</a:t>
             </a:r>
           </a:p>
         </p:txBody>
@@ -697,7 +734,7 @@
           <a:p xmlns:a="http://schemas.openxmlformats.org/drawingml/2006/main">
             <a:r>
               <a:rPr lang="en-US"/>
-              <a:t>Honest envelope.</a:t>
+              <a:t>Causal language carefully: farm contributed; not sole cause.</a:t>
             </a:r>
           </a:p>
         </p:txBody>
@@ -752,7 +789,7 @@
           <a:p xmlns:a="http://schemas.openxmlformats.org/drawingml/2006/main">
             <a:r>
               <a:rPr lang="en-US"/>
-              <a:t>Walk trade-offs; land recommendation.</a:t>
+              <a:t>Honest envelope.</a:t>
             </a:r>
           </a:p>
         </p:txBody>
@@ -766,6 +803,61 @@
 </file>
 
 <file path=ppt/notesSlides/notesSlide7.xml><?xml version="1.0" encoding="utf-8"?>
+<p:notes xmlns:p="http://schemas.openxmlformats.org/presentationml/2006/main">
+  <p:cSld>
+    <p:spTree>
+      <p:nvGrpSpPr>
+        <p:cNvPr id="1" name=""/>
+        <p:cNvGrpSpPr/>
+        <p:nvPr/>
+      </p:nvGrpSpPr>
+      <p:grpSpPr>
+        <a:xfrm xmlns:a="http://schemas.openxmlformats.org/drawingml/2006/main"/>
+      </p:grpSpPr>
+      <p:sp>
+        <p:nvSpPr>
+          <p:cNvPr id="2" name="Slide Image Placeholder 1"/>
+          <p:cNvSpPr/>
+          <p:nvPr>
+            <p:ph type="sldImg" idx="0"/>
+          </p:nvPr>
+        </p:nvSpPr>
+        <p:spPr/>
+        <p:txBody>
+          <a:bodyPr xmlns:a="http://schemas.openxmlformats.org/drawingml/2006/main"/>
+          <a:lstStyle xmlns:a="http://schemas.openxmlformats.org/drawingml/2006/main"/>
+          <a:p xmlns:a="http://schemas.openxmlformats.org/drawingml/2006/main"/>
+        </p:txBody>
+      </p:sp>
+      <p:sp>
+        <p:nvSpPr>
+          <p:cNvPr id="3" name="Notes Placeholder 2"/>
+          <p:cNvSpPr/>
+          <p:nvPr>
+            <p:ph type="body" idx="1"/>
+          </p:nvPr>
+        </p:nvSpPr>
+        <p:spPr/>
+        <p:txBody>
+          <a:bodyPr xmlns:a="http://schemas.openxmlformats.org/drawingml/2006/main"/>
+          <a:lstStyle xmlns:a="http://schemas.openxmlformats.org/drawingml/2006/main"/>
+          <a:p xmlns:a="http://schemas.openxmlformats.org/drawingml/2006/main">
+            <a:r>
+              <a:rPr lang="en-US"/>
+              <a:t>Walk trade-offs; land recommendation.</a:t>
+            </a:r>
+          </a:p>
+        </p:txBody>
+      </p:sp>
+    </p:spTree>
+  </p:cSld>
+  <p:clrMapOvr>
+    <a:masterClrMapping xmlns:a="http://schemas.openxmlformats.org/drawingml/2006/main"/>
+  </p:clrMapOvr>
+</p:notes>
+</file>
+
+<file path=ppt/notesSlides/notesSlide8.xml><?xml version="1.0" encoding="utf-8"?>
 <p:notes xmlns:p="http://schemas.openxmlformats.org/presentationml/2006/main">
   <p:cSld>
     <p:spTree>
@@ -1135,8 +1227,8 @@
         </p:nvSpPr>
         <p:spPr>
           <a:xfrm xmlns:a="http://schemas.openxmlformats.org/drawingml/2006/main">
-            <a:off x="504000" y="1008000"/>
-            <a:ext cx="11088000" cy="324000"/>
+            <a:off x="504000" y="936000"/>
+            <a:ext cx="11088000" cy="306000"/>
           </a:xfrm>
           <a:prstGeom xmlns:a="http://schemas.openxmlformats.org/drawingml/2006/main" prst="rect">
             <a:avLst/>
@@ -1167,8 +1259,8 @@
         </p:nvSpPr>
         <p:spPr>
           <a:xfrm xmlns:a="http://schemas.openxmlformats.org/drawingml/2006/main">
-            <a:off x="504000" y="1440000"/>
-            <a:ext cx="11088000" cy="936000"/>
+            <a:off x="504000" y="1332000"/>
+            <a:ext cx="11088000" cy="900000"/>
           </a:xfrm>
           <a:prstGeom xmlns:a="http://schemas.openxmlformats.org/drawingml/2006/main" prst="rect">
             <a:avLst/>
@@ -1179,7 +1271,7 @@
           <a:lstStyle xmlns:a="http://schemas.openxmlformats.org/drawingml/2006/main"/>
           <a:p xmlns:a="http://schemas.openxmlformats.org/drawingml/2006/main">
             <a:r>
-              <a:rPr lang="en-US" sz="3400" b="1">
+              <a:rPr lang="en-US" sz="3200" b="1">
                 <a:solidFill>
                   <a:srgbClr val="FFFFFF"/>
                 </a:solidFill>
@@ -1199,8 +1291,8 @@
         </p:nvSpPr>
         <p:spPr>
           <a:xfrm xmlns:a="http://schemas.openxmlformats.org/drawingml/2006/main">
-            <a:off x="504000" y="2520000"/>
-            <a:ext cx="11088000" cy="720000"/>
+            <a:off x="504000" y="2340000"/>
+            <a:ext cx="11088000" cy="648000"/>
           </a:xfrm>
           <a:prstGeom xmlns:a="http://schemas.openxmlformats.org/drawingml/2006/main" prst="rect">
             <a:avLst/>
@@ -1211,7 +1303,7 @@
           <a:lstStyle xmlns:a="http://schemas.openxmlformats.org/drawingml/2006/main"/>
           <a:p xmlns:a="http://schemas.openxmlformats.org/drawingml/2006/main">
             <a:r>
-              <a:rPr lang="en-US" sz="1700" b="0">
+              <a:rPr lang="en-US" sz="1600" b="0">
                 <a:solidFill>
                   <a:srgbClr val="CADCFC"/>
                 </a:solidFill>
@@ -1226,6 +1318,38 @@
       <p:sp>
         <p:nvSpPr>
           <p:cNvPr id="100003" name="TextBox 4"/>
+          <p:cNvSpPr txBox="1"/>
+          <p:nvPr/>
+        </p:nvSpPr>
+        <p:spPr>
+          <a:xfrm xmlns:a="http://schemas.openxmlformats.org/drawingml/2006/main">
+            <a:off x="504000" y="3240000"/>
+            <a:ext cx="11088000" cy="576000"/>
+          </a:xfrm>
+          <a:prstGeom xmlns:a="http://schemas.openxmlformats.org/drawingml/2006/main" prst="rect">
+            <a:avLst/>
+          </a:prstGeom>
+        </p:spPr>
+        <p:txBody>
+          <a:bodyPr xmlns:a="http://schemas.openxmlformats.org/drawingml/2006/main"/>
+          <a:lstStyle xmlns:a="http://schemas.openxmlformats.org/drawingml/2006/main"/>
+          <a:p xmlns:a="http://schemas.openxmlformats.org/drawingml/2006/main">
+            <a:r>
+              <a:rPr lang="en-US" sz="1400" b="0">
+                <a:solidFill>
+                  <a:srgbClr val="A0C4E8"/>
+                </a:solidFill>
+                <a:latin typeface="Calibri"/>
+                <a:ea typeface="Calibri"/>
+              </a:rPr>
+              <a:t>Pattern: Platform / shared infra investment impact chain</a:t>
+            </a:r>
+          </a:p>
+        </p:txBody>
+      </p:sp>
+      <p:sp>
+        <p:nvSpPr>
+          <p:cNvPr id="100004" name="TextBox 5"/>
           <p:cNvSpPr txBox="1"/>
           <p:nvPr/>
         </p:nvSpPr>
@@ -1261,6 +1385,279 @@
 </file>
 
 <file path=ppt/slides/slide2.xml><?xml version="1.0" encoding="utf-8"?>
+<p:sld xmlns:p="http://schemas.openxmlformats.org/presentationml/2006/main">
+  <p:cSld name="Pattern provenance">
+    <p:bg>
+      <p:bgPr>
+        <a:solidFill xmlns:a="http://schemas.openxmlformats.org/drawingml/2006/main">
+          <a:srgbClr val="F4F7FC"/>
+        </a:solidFill>
+      </p:bgPr>
+    </p:bg>
+    <p:spTree>
+      <p:nvGrpSpPr>
+        <p:cNvPr id="1" name=""/>
+        <p:cNvGrpSpPr/>
+        <p:nvPr/>
+      </p:nvGrpSpPr>
+      <p:grpSpPr/>
+      <p:sp>
+        <p:nvSpPr>
+          <p:cNvPr id="100005" name="TextBox 1"/>
+          <p:cNvSpPr txBox="1"/>
+          <p:nvPr/>
+        </p:nvSpPr>
+        <p:spPr>
+          <a:xfrm xmlns:a="http://schemas.openxmlformats.org/drawingml/2006/main">
+            <a:off x="504000" y="270000"/>
+            <a:ext cx="11088000" cy="270000"/>
+          </a:xfrm>
+          <a:prstGeom xmlns:a="http://schemas.openxmlformats.org/drawingml/2006/main" prst="rect">
+            <a:avLst/>
+          </a:prstGeom>
+        </p:spPr>
+        <p:txBody>
+          <a:bodyPr xmlns:a="http://schemas.openxmlformats.org/drawingml/2006/main"/>
+          <a:lstStyle xmlns:a="http://schemas.openxmlformats.org/drawingml/2006/main"/>
+          <a:p xmlns:a="http://schemas.openxmlformats.org/drawingml/2006/main">
+            <a:r>
+              <a:rPr lang="en-US" sz="1100" b="1">
+                <a:solidFill>
+                  <a:srgbClr val="2B6CB0"/>
+                </a:solidFill>
+                <a:latin typeface="Calibri"/>
+                <a:ea typeface="Calibri"/>
+              </a:rPr>
+              <a:t>WHERE THIS DECK SHAPE COMES FROM</a:t>
+            </a:r>
+          </a:p>
+        </p:txBody>
+      </p:sp>
+      <p:sp>
+        <p:nvSpPr>
+          <p:cNvPr id="100006" name="TextBox 2"/>
+          <p:cNvSpPr txBox="1"/>
+          <p:nvPr/>
+        </p:nvSpPr>
+        <p:spPr>
+          <a:xfrm xmlns:a="http://schemas.openxmlformats.org/drawingml/2006/main">
+            <a:off x="504000" y="558000"/>
+            <a:ext cx="11088000" cy="612000"/>
+          </a:xfrm>
+          <a:prstGeom xmlns:a="http://schemas.openxmlformats.org/drawingml/2006/main" prst="rect">
+            <a:avLst/>
+          </a:prstGeom>
+        </p:spPr>
+        <p:txBody>
+          <a:bodyPr xmlns:a="http://schemas.openxmlformats.org/drawingml/2006/main"/>
+          <a:lstStyle xmlns:a="http://schemas.openxmlformats.org/drawingml/2006/main"/>
+          <a:p xmlns:a="http://schemas.openxmlformats.org/drawingml/2006/main">
+            <a:r>
+              <a:rPr lang="en-US" sz="2800" b="1">
+                <a:solidFill>
+                  <a:srgbClr val="1A202C"/>
+                </a:solidFill>
+                <a:latin typeface="Calibri"/>
+                <a:ea typeface="Calibri"/>
+              </a:rPr>
+              <a:t>Pattern provenance</a:t>
+            </a:r>
+          </a:p>
+        </p:txBody>
+      </p:sp>
+      <p:sp>
+        <p:nvSpPr>
+          <p:cNvPr id="100007" name="TextBox 3"/>
+          <p:cNvSpPr txBox="1"/>
+          <p:nvPr/>
+        </p:nvSpPr>
+        <p:spPr>
+          <a:xfrm xmlns:a="http://schemas.openxmlformats.org/drawingml/2006/main">
+            <a:off x="504000" y="1260000"/>
+            <a:ext cx="11088000" cy="4860000"/>
+          </a:xfrm>
+          <a:prstGeom xmlns:a="http://schemas.openxmlformats.org/drawingml/2006/main" prst="rect">
+            <a:avLst/>
+          </a:prstGeom>
+          <a:solidFill xmlns:a="http://schemas.openxmlformats.org/drawingml/2006/main">
+            <a:srgbClr val="FFFFFF"/>
+          </a:solidFill>
+        </p:spPr>
+        <p:txBody>
+          <a:bodyPr xmlns:a="http://schemas.openxmlformats.org/drawingml/2006/main"/>
+          <a:lstStyle xmlns:a="http://schemas.openxmlformats.org/drawingml/2006/main"/>
+          <a:p xmlns:a="http://schemas.openxmlformats.org/drawingml/2006/main">
+            <a:r>
+              <a:rPr lang="en-US" sz="1500" b="0">
+                <a:solidFill>
+                  <a:srgbClr val="1A202C"/>
+                </a:solidFill>
+                <a:latin typeface="Calibri"/>
+                <a:ea typeface="Calibri"/>
+              </a:rPr>
+              <a:t>Public pattern (structure only — not a confidential company deck):</a:t>
+            </a:r>
+          </a:p>
+          <a:p xmlns:a="http://schemas.openxmlformats.org/drawingml/2006/main">
+            <a:r>
+              <a:rPr lang="en-US" sz="1500" b="0">
+                <a:solidFill>
+                  <a:srgbClr val="1A202C"/>
+                </a:solidFill>
+                <a:latin typeface="Calibri"/>
+                <a:ea typeface="Calibri"/>
+              </a:rPr>
+              <a:t/>
+            </a:r>
+          </a:p>
+          <a:p xmlns:a="http://schemas.openxmlformats.org/drawingml/2006/main">
+            <a:r>
+              <a:rPr lang="en-US" sz="1500" b="0">
+                <a:solidFill>
+                  <a:srgbClr val="1A202C"/>
+                </a:solidFill>
+                <a:latin typeface="Calibri"/>
+                <a:ea typeface="Calibri"/>
+              </a:rPr>
+              <a:t>Platform / shared infra investment impact chain</a:t>
+            </a:r>
+          </a:p>
+          <a:p xmlns:a="http://schemas.openxmlformats.org/drawingml/2006/main">
+            <a:r>
+              <a:rPr lang="en-US" sz="1500" b="0">
+                <a:solidFill>
+                  <a:srgbClr val="1A202C"/>
+                </a:solidFill>
+                <a:latin typeface="Calibri"/>
+                <a:ea typeface="Calibri"/>
+              </a:rPr>
+              <a:t/>
+            </a:r>
+          </a:p>
+          <a:p xmlns:a="http://schemas.openxmlformats.org/drawingml/2006/main">
+            <a:r>
+              <a:rPr lang="en-US" sz="1500" b="0">
+                <a:solidFill>
+                  <a:srgbClr val="1A202C"/>
+                </a:solidFill>
+                <a:latin typeface="Calibri"/>
+                <a:ea typeface="Calibri"/>
+              </a:rPr>
+              <a:t>• EM Tools — executive communication / impact framing</a:t>
+            </a:r>
+          </a:p>
+          <a:p xmlns:a="http://schemas.openxmlformats.org/drawingml/2006/main">
+            <a:r>
+              <a:rPr lang="en-US" sz="1500" b="0">
+                <a:solidFill>
+                  <a:srgbClr val="1A202C"/>
+                </a:solidFill>
+                <a:latin typeface="Calibri"/>
+                <a:ea typeface="Calibri"/>
+              </a:rPr>
+              <a:t>  https://www.em-tools.io/engineering-manager-responsibilities/executive-communication</a:t>
+            </a:r>
+          </a:p>
+          <a:p xmlns:a="http://schemas.openxmlformats.org/drawingml/2006/main">
+            <a:r>
+              <a:rPr lang="en-US" sz="1500" b="0">
+                <a:solidFill>
+                  <a:srgbClr val="1A202C"/>
+                </a:solidFill>
+                <a:latin typeface="Calibri"/>
+                <a:ea typeface="Calibri"/>
+              </a:rPr>
+              <a:t>• StaffEng — strategy as leverage (not ticket dumps)</a:t>
+            </a:r>
+          </a:p>
+          <a:p xmlns:a="http://schemas.openxmlformats.org/drawingml/2006/main">
+            <a:r>
+              <a:rPr lang="en-US" sz="1500" b="0">
+                <a:solidFill>
+                  <a:srgbClr val="1A202C"/>
+                </a:solidFill>
+                <a:latin typeface="Calibri"/>
+                <a:ea typeface="Calibri"/>
+              </a:rPr>
+              <a:t>  https://staffeng.com/guides/engineering-strategy/</a:t>
+            </a:r>
+          </a:p>
+          <a:p xmlns:a="http://schemas.openxmlformats.org/drawingml/2006/main">
+            <a:r>
+              <a:rPr lang="en-US" sz="1500" b="0">
+                <a:solidFill>
+                  <a:srgbClr val="1A202C"/>
+                </a:solidFill>
+                <a:latin typeface="Calibri"/>
+                <a:ea typeface="Calibri"/>
+              </a:rPr>
+              <a:t/>
+            </a:r>
+          </a:p>
+          <a:p xmlns:a="http://schemas.openxmlformats.org/drawingml/2006/main">
+            <a:r>
+              <a:rPr lang="en-US" sz="1500" b="0">
+                <a:solidFill>
+                  <a:srgbClr val="1A202C"/>
+                </a:solidFill>
+                <a:latin typeface="Calibri"/>
+                <a:ea typeface="Calibri"/>
+              </a:rPr>
+              <a:t>How to use: copy section order and decision verbs; replace with your metrics.</a:t>
+            </a:r>
+          </a:p>
+          <a:p xmlns:a="http://schemas.openxmlformats.org/drawingml/2006/main">
+            <a:r>
+              <a:rPr lang="en-US" sz="1500" b="0">
+                <a:solidFill>
+                  <a:srgbClr val="1A202C"/>
+                </a:solidFill>
+                <a:latin typeface="Calibri"/>
+                <a:ea typeface="Calibri"/>
+              </a:rPr>
+              <a:t>In-repo: skills/presentations/classic-public-cases.md</a:t>
+            </a:r>
+          </a:p>
+        </p:txBody>
+      </p:sp>
+      <p:sp>
+        <p:nvSpPr>
+          <p:cNvPr id="100008" name="TextBox 4"/>
+          <p:cNvSpPr txBox="1"/>
+          <p:nvPr/>
+        </p:nvSpPr>
+        <p:spPr>
+          <a:xfrm xmlns:a="http://schemas.openxmlformats.org/drawingml/2006/main">
+            <a:off x="504000" y="6426000"/>
+            <a:ext cx="11088000" cy="306000"/>
+          </a:xfrm>
+          <a:prstGeom xmlns:a="http://schemas.openxmlformats.org/drawingml/2006/main" prst="rect">
+            <a:avLst/>
+          </a:prstGeom>
+        </p:spPr>
+        <p:txBody>
+          <a:bodyPr xmlns:a="http://schemas.openxmlformats.org/drawingml/2006/main"/>
+          <a:lstStyle xmlns:a="http://schemas.openxmlformats.org/drawingml/2006/main"/>
+          <a:p xmlns:a="http://schemas.openxmlformats.org/drawingml/2006/main">
+            <a:r>
+              <a:rPr lang="en-US" sz="1100" b="0">
+                <a:solidFill>
+                  <a:srgbClr val="718096"/>
+                </a:solidFill>
+                <a:latin typeface="Calibri"/>
+                <a:ea typeface="Calibri"/>
+              </a:rPr>
+              <a:t>Atlas Platform  ·  Project Aurora  ·  NovaSemi  ·  2026</a:t>
+            </a:r>
+          </a:p>
+        </p:txBody>
+      </p:sp>
+    </p:spTree>
+  </p:cSld>
+</p:sld>
+</file>
+
+<file path=ppt/slides/slide3.xml><?xml version="1.0" encoding="utf-8"?>
 <p:sld xmlns:p="http://schemas.openxmlformats.org/presentationml/2006/main">
   <p:cSld name="BLUF — continue farm; expand +20 seats">
     <p:bg>
@@ -1279,7 +1676,7 @@
       <p:grpSpPr/>
       <p:sp>
         <p:nvSpPr>
-          <p:cNvPr id="100004" name="TextBox 1"/>
+          <p:cNvPr id="100009" name="TextBox 1"/>
           <p:cNvSpPr txBox="1"/>
           <p:nvPr/>
         </p:nvSpPr>
@@ -1311,7 +1708,7 @@
       </p:sp>
       <p:sp>
         <p:nvSpPr>
-          <p:cNvPr id="100005" name="TextBox 2"/>
+          <p:cNvPr id="100010" name="TextBox 2"/>
           <p:cNvSpPr txBox="1"/>
           <p:nvPr/>
         </p:nvSpPr>
@@ -1343,7 +1740,7 @@
       </p:sp>
       <p:sp>
         <p:nvSpPr>
-          <p:cNvPr id="100006" name="TextBox 3"/>
+          <p:cNvPr id="100011" name="TextBox 3"/>
           <p:cNvSpPr txBox="1"/>
           <p:nvPr/>
         </p:nvSpPr>
@@ -1378,7 +1775,7 @@
       </p:sp>
       <p:sp>
         <p:nvSpPr>
-          <p:cNvPr id="100007" name="TextBox 4"/>
+          <p:cNvPr id="100012" name="TextBox 4"/>
           <p:cNvSpPr txBox="1"/>
           <p:nvPr/>
         </p:nvSpPr>
@@ -1485,7 +1882,7 @@
       </p:sp>
       <p:sp>
         <p:nvSpPr>
-          <p:cNvPr id="100008" name="TextBox 5"/>
+          <p:cNvPr id="100013" name="TextBox 5"/>
           <p:cNvSpPr txBox="1"/>
           <p:nvPr/>
         </p:nvSpPr>
@@ -1520,7 +1917,7 @@
 </p:sld>
 </file>
 
-<file path=ppt/slides/slide3.xml><?xml version="1.0" encoding="utf-8"?>
+<file path=ppt/slides/slide4.xml><?xml version="1.0" encoding="utf-8"?>
 <p:sld xmlns:p="http://schemas.openxmlformats.org/presentationml/2006/main">
   <p:cSld name="Business problem attacked">
     <p:bg>
@@ -1539,7 +1936,7 @@
       <p:grpSpPr/>
       <p:sp>
         <p:nvSpPr>
-          <p:cNvPr id="100009" name="TextBox 1"/>
+          <p:cNvPr id="100014" name="TextBox 1"/>
           <p:cNvSpPr txBox="1"/>
           <p:nvPr/>
         </p:nvSpPr>
@@ -1571,7 +1968,7 @@
       </p:sp>
       <p:sp>
         <p:nvSpPr>
-          <p:cNvPr id="100010" name="TextBox 2"/>
+          <p:cNvPr id="100015" name="TextBox 2"/>
           <p:cNvSpPr txBox="1"/>
           <p:nvPr/>
         </p:nvSpPr>
@@ -1630,7 +2027,7 @@
       </p:sp>
       <p:sp>
         <p:nvSpPr>
-          <p:cNvPr id="100011" name="TextBox 3"/>
+          <p:cNvPr id="100016" name="TextBox 3"/>
           <p:cNvSpPr txBox="1"/>
           <p:nvPr/>
         </p:nvSpPr>
@@ -1665,7 +2062,7 @@
 </p:sld>
 </file>
 
-<file path=ppt/slides/slide4.xml><?xml version="1.0" encoding="utf-8"?>
+<file path=ppt/slides/slide5.xml><?xml version="1.0" encoding="utf-8"?>
 <p:sld xmlns:p="http://schemas.openxmlformats.org/presentationml/2006/main">
   <p:cSld name="Impact chain">
     <p:bg>
@@ -1684,7 +2081,7 @@
       <p:grpSpPr/>
       <p:sp>
         <p:nvSpPr>
-          <p:cNvPr id="100012" name="TextBox 1"/>
+          <p:cNvPr id="100017" name="TextBox 1"/>
           <p:cNvSpPr txBox="1"/>
           <p:nvPr/>
         </p:nvSpPr>
@@ -1716,7 +2113,7 @@
       </p:sp>
       <p:sp>
         <p:nvSpPr>
-          <p:cNvPr id="100013" name="TextBox 2"/>
+          <p:cNvPr id="100018" name="TextBox 2"/>
           <p:cNvSpPr txBox="1"/>
           <p:nvPr/>
         </p:nvSpPr>
@@ -1787,7 +2184,7 @@
       </p:sp>
       <p:sp>
         <p:nvSpPr>
-          <p:cNvPr id="100014" name="TextBox 3"/>
+          <p:cNvPr id="100019" name="TextBox 3"/>
           <p:cNvSpPr txBox="1"/>
           <p:nvPr/>
         </p:nvSpPr>
@@ -1822,7 +2219,7 @@
 </p:sld>
 </file>
 
-<file path=ppt/slides/slide5.xml><?xml version="1.0" encoding="utf-8"?>
+<file path=ppt/slides/slide6.xml><?xml version="1.0" encoding="utf-8"?>
 <p:sld xmlns:p="http://schemas.openxmlformats.org/presentationml/2006/main">
   <p:cSld name="Counterfactual &amp; what we will not claim">
     <p:bg>
@@ -1841,7 +2238,7 @@
       <p:grpSpPr/>
       <p:sp>
         <p:nvSpPr>
-          <p:cNvPr id="100015" name="TextBox 1"/>
+          <p:cNvPr id="100020" name="TextBox 1"/>
           <p:cNvSpPr txBox="1"/>
           <p:nvPr/>
         </p:nvSpPr>
@@ -1873,7 +2270,7 @@
       </p:sp>
       <p:sp>
         <p:nvSpPr>
-          <p:cNvPr id="100016" name="TextBox 2"/>
+          <p:cNvPr id="100021" name="TextBox 2"/>
           <p:cNvSpPr txBox="1"/>
           <p:nvPr/>
         </p:nvSpPr>
@@ -1932,7 +2329,7 @@
       </p:sp>
       <p:sp>
         <p:nvSpPr>
-          <p:cNvPr id="100017" name="TextBox 3"/>
+          <p:cNvPr id="100022" name="TextBox 3"/>
           <p:cNvSpPr txBox="1"/>
           <p:nvPr/>
         </p:nvSpPr>
@@ -1967,7 +2364,7 @@
 </p:sld>
 </file>
 
-<file path=ppt/slides/slide6.xml><?xml version="1.0" encoding="utf-8"?>
+<file path=ppt/slides/slide7.xml><?xml version="1.0" encoding="utf-8"?>
 <p:sld xmlns:p="http://schemas.openxmlformats.org/presentationml/2006/main">
   <p:cSld name="Options &amp; recommendation">
     <p:bg>
@@ -1986,7 +2383,7 @@
       <p:grpSpPr/>
       <p:sp>
         <p:nvSpPr>
-          <p:cNvPr id="100018" name="TextBox 1"/>
+          <p:cNvPr id="100023" name="TextBox 1"/>
           <p:cNvSpPr txBox="1"/>
           <p:nvPr/>
         </p:nvSpPr>
@@ -2018,7 +2415,7 @@
       </p:sp>
       <p:sp>
         <p:nvSpPr>
-          <p:cNvPr id="100019" name="TextBox 2"/>
+          <p:cNvPr id="100024" name="TextBox 2"/>
           <p:cNvSpPr txBox="1"/>
           <p:nvPr/>
         </p:nvSpPr>
@@ -2050,7 +2447,7 @@
       </p:sp>
       <p:graphicFrame>
         <p:nvGraphicFramePr>
-          <p:cNvPr id="100020" name="Table 1"/>
+          <p:cNvPr id="100025" name="Table 1"/>
           <p:cNvGraphicFramePr/>
           <p:nvPr/>
         </p:nvGraphicFramePr>
@@ -2450,7 +2847,7 @@
       </p:graphicFrame>
       <p:sp>
         <p:nvSpPr>
-          <p:cNvPr id="100021" name="TextBox 3"/>
+          <p:cNvPr id="100026" name="TextBox 3"/>
           <p:cNvSpPr txBox="1"/>
           <p:nvPr/>
         </p:nvSpPr>
@@ -2485,7 +2882,7 @@
 </p:sld>
 </file>
 
-<file path=ppt/slides/slide7.xml><?xml version="1.0" encoding="utf-8"?>
+<file path=ppt/slides/slide8.xml><?xml version="1.0" encoding="utf-8"?>
 <p:sld xmlns:p="http://schemas.openxmlformats.org/presentationml/2006/main">
   <p:cSld name="Decision &amp; ask">
     <p:bg>
@@ -2504,7 +2901,7 @@
       <p:grpSpPr/>
       <p:sp>
         <p:nvSpPr>
-          <p:cNvPr id="100022" name="TextBox 1"/>
+          <p:cNvPr id="100027" name="TextBox 1"/>
           <p:cNvSpPr txBox="1"/>
           <p:nvPr/>
         </p:nvSpPr>
@@ -2536,7 +2933,7 @@
       </p:sp>
       <p:sp>
         <p:nvSpPr>
-          <p:cNvPr id="100023" name="TextBox 2"/>
+          <p:cNvPr id="100028" name="TextBox 2"/>
           <p:cNvSpPr txBox="1"/>
           <p:nvPr/>
         </p:nvSpPr>
@@ -2568,7 +2965,7 @@
       </p:sp>
       <p:sp>
         <p:nvSpPr>
-          <p:cNvPr id="100024" name="TextBox 3"/>
+          <p:cNvPr id="100029" name="TextBox 3"/>
           <p:cNvSpPr txBox="1"/>
           <p:nvPr/>
         </p:nvSpPr>
@@ -2651,7 +3048,7 @@
       </p:sp>
       <p:sp>
         <p:nvSpPr>
-          <p:cNvPr id="100025" name="TextBox 4"/>
+          <p:cNvPr id="100030" name="TextBox 4"/>
           <p:cNvSpPr txBox="1"/>
           <p:nvPr/>
         </p:nvSpPr>

--- a/skills/presentations/assets/pptx/examples/04-benefit-value.pptx
+++ b/skills/presentations/assets/pptx/examples/04-benefit-value.pptx
@@ -5,17 +5,18 @@
     <p:sldMasterId xmlns:r="http://schemas.openxmlformats.org/officeDocument/2006/relationships" id="2147483648" r:id="rId1"/>
   </p:sldMasterIdLst>
   <p:notesMasterIdLst>
-    <p:notesMasterId r:id="Rf5f381d27c43438a"/>
+    <p:notesMasterId r:id="Rf1832291ccf041fc"/>
   </p:notesMasterIdLst>
   <p:sldIdLst>
-    <p:sldId id="256" r:id="Rdfbf30943bc04779"/>
-    <p:sldId id="257" r:id="Rd28cbeca0b674d49"/>
-    <p:sldId id="258" r:id="R51b944d86b404645"/>
-    <p:sldId id="259" r:id="R3ae50cea2c9b4248"/>
-    <p:sldId id="260" r:id="Rc69f3dfdac6448c4"/>
-    <p:sldId id="261" r:id="R2b964038a3074da1"/>
-    <p:sldId id="262" r:id="R7dcf2a710bcd4453"/>
-    <p:sldId id="263" r:id="R161fab1e3ade4960"/>
+    <p:sldId id="256" r:id="R5f52c06d4fbd47bc"/>
+    <p:sldId id="257" r:id="R5b37565555104dbc"/>
+    <p:sldId id="258" r:id="Rab5ccdbcb09646c7"/>
+    <p:sldId id="259" r:id="R92c8ba5d257f4004"/>
+    <p:sldId id="260" r:id="Rb483abbe16714812"/>
+    <p:sldId id="261" r:id="Rf2552359dbe24a3a"/>
+    <p:sldId id="262" r:id="R3b88ca8e3a9f49e0"/>
+    <p:sldId id="263" r:id="Rd69369e25b6445e1"/>
+    <p:sldId id="264" r:id="R5ebb5adebfce4657"/>
   </p:sldIdLst>
   <p:sldSz cx="12192000" cy="6858000"/>
   <p:notesSz cx="6858000" cy="9144000"/>
@@ -624,7 +625,7 @@
           <a:p xmlns:a="http://schemas.openxmlformats.org/drawingml/2006/main">
             <a:r>
               <a:rPr lang="en-US"/>
-              <a:t>Portfolio decision with labeled assumptions.</a:t>
+              <a:t>Agent/human: answer who/stakes/decision from this slide alone. Recommend=EXPAND +20 seats; ~5-month payback envelope on avoided spin risk (assumptions labeled). by 2026-05-30 finance window.</a:t>
             </a:r>
           </a:p>
         </p:txBody>
@@ -679,7 +680,7 @@
           <a:p xmlns:a="http://schemas.openxmlformats.org/drawingml/2006/main">
             <a:r>
               <a:rPr lang="en-US"/>
-              <a:t>Schedule = money on spin.</a:t>
+              <a:t>Portfolio decision with labeled assumptions.</a:t>
             </a:r>
           </a:p>
         </p:txBody>
@@ -734,7 +735,7 @@
           <a:p xmlns:a="http://schemas.openxmlformats.org/drawingml/2006/main">
             <a:r>
               <a:rPr lang="en-US"/>
-              <a:t>Causal language carefully: farm contributed; not sole cause.</a:t>
+              <a:t>Schedule = money on spin.</a:t>
             </a:r>
           </a:p>
         </p:txBody>
@@ -789,7 +790,7 @@
           <a:p xmlns:a="http://schemas.openxmlformats.org/drawingml/2006/main">
             <a:r>
               <a:rPr lang="en-US"/>
-              <a:t>Honest envelope.</a:t>
+              <a:t>Causal language carefully: farm contributed; not sole cause.</a:t>
             </a:r>
           </a:p>
         </p:txBody>
@@ -844,7 +845,7 @@
           <a:p xmlns:a="http://schemas.openxmlformats.org/drawingml/2006/main">
             <a:r>
               <a:rPr lang="en-US"/>
-              <a:t>Walk trade-offs; land recommendation.</a:t>
+              <a:t>Honest envelope.</a:t>
             </a:r>
           </a:p>
         </p:txBody>
@@ -858,6 +859,61 @@
 </file>
 
 <file path=ppt/notesSlides/notesSlide8.xml><?xml version="1.0" encoding="utf-8"?>
+<p:notes xmlns:p="http://schemas.openxmlformats.org/presentationml/2006/main">
+  <p:cSld>
+    <p:spTree>
+      <p:nvGrpSpPr>
+        <p:cNvPr id="1" name=""/>
+        <p:cNvGrpSpPr/>
+        <p:nvPr/>
+      </p:nvGrpSpPr>
+      <p:grpSpPr>
+        <a:xfrm xmlns:a="http://schemas.openxmlformats.org/drawingml/2006/main"/>
+      </p:grpSpPr>
+      <p:sp>
+        <p:nvSpPr>
+          <p:cNvPr id="2" name="Slide Image Placeholder 1"/>
+          <p:cNvSpPr/>
+          <p:nvPr>
+            <p:ph type="sldImg" idx="0"/>
+          </p:nvPr>
+        </p:nvSpPr>
+        <p:spPr/>
+        <p:txBody>
+          <a:bodyPr xmlns:a="http://schemas.openxmlformats.org/drawingml/2006/main"/>
+          <a:lstStyle xmlns:a="http://schemas.openxmlformats.org/drawingml/2006/main"/>
+          <a:p xmlns:a="http://schemas.openxmlformats.org/drawingml/2006/main"/>
+        </p:txBody>
+      </p:sp>
+      <p:sp>
+        <p:nvSpPr>
+          <p:cNvPr id="3" name="Notes Placeholder 2"/>
+          <p:cNvSpPr/>
+          <p:nvPr>
+            <p:ph type="body" idx="1"/>
+          </p:nvPr>
+        </p:nvSpPr>
+        <p:spPr/>
+        <p:txBody>
+          <a:bodyPr xmlns:a="http://schemas.openxmlformats.org/drawingml/2006/main"/>
+          <a:lstStyle xmlns:a="http://schemas.openxmlformats.org/drawingml/2006/main"/>
+          <a:p xmlns:a="http://schemas.openxmlformats.org/drawingml/2006/main">
+            <a:r>
+              <a:rPr lang="en-US"/>
+              <a:t>Walk trade-offs; land recommendation.</a:t>
+            </a:r>
+          </a:p>
+        </p:txBody>
+      </p:sp>
+    </p:spTree>
+  </p:cSld>
+  <p:clrMapOvr>
+    <a:masterClrMapping xmlns:a="http://schemas.openxmlformats.org/drawingml/2006/main"/>
+  </p:clrMapOvr>
+</p:notes>
+</file>
+
+<file path=ppt/notesSlides/notesSlide9.xml><?xml version="1.0" encoding="utf-8"?>
 <p:notes xmlns:p="http://schemas.openxmlformats.org/presentationml/2006/main">
   <p:cSld>
     <p:spTree>
@@ -1659,6 +1715,387 @@
 
 <file path=ppt/slides/slide3.xml><?xml version="1.0" encoding="utf-8"?>
 <p:sld xmlns:p="http://schemas.openxmlformats.org/presentationml/2006/main">
+  <p:cSld name="Situation &amp; decision card">
+    <p:bg>
+      <p:bgPr>
+        <a:solidFill xmlns:a="http://schemas.openxmlformats.org/drawingml/2006/main">
+          <a:srgbClr val="F4F7FC"/>
+        </a:solidFill>
+      </p:bgPr>
+    </p:bg>
+    <p:spTree>
+      <p:nvGrpSpPr>
+        <p:cNvPr id="1" name=""/>
+        <p:cNvGrpSpPr/>
+        <p:nvPr/>
+      </p:nvGrpSpPr>
+      <p:grpSpPr/>
+      <p:sp>
+        <p:nvSpPr>
+          <p:cNvPr id="100009" name="TextBox 1"/>
+          <p:cNvSpPr txBox="1"/>
+          <p:nvPr/>
+        </p:nvSpPr>
+        <p:spPr>
+          <a:xfrm xmlns:a="http://schemas.openxmlformats.org/drawingml/2006/main">
+            <a:off x="504000" y="270000"/>
+            <a:ext cx="11088000" cy="270000"/>
+          </a:xfrm>
+          <a:prstGeom xmlns:a="http://schemas.openxmlformats.org/drawingml/2006/main" prst="rect">
+            <a:avLst/>
+          </a:prstGeom>
+        </p:spPr>
+        <p:txBody>
+          <a:bodyPr xmlns:a="http://schemas.openxmlformats.org/drawingml/2006/main"/>
+          <a:lstStyle xmlns:a="http://schemas.openxmlformats.org/drawingml/2006/main"/>
+          <a:p xmlns:a="http://schemas.openxmlformats.org/drawingml/2006/main">
+            <a:r>
+              <a:rPr lang="en-US" sz="1100" b="1">
+                <a:solidFill>
+                  <a:srgbClr val="2B6CB0"/>
+                </a:solidFill>
+                <a:latin typeface="Calibri"/>
+                <a:ea typeface="Calibri"/>
+              </a:rPr>
+              <a:t>READ THIS BEFORE THE DETAILS</a:t>
+            </a:r>
+          </a:p>
+        </p:txBody>
+      </p:sp>
+      <p:sp>
+        <p:nvSpPr>
+          <p:cNvPr id="100010" name="TextBox 2"/>
+          <p:cNvSpPr txBox="1"/>
+          <p:nvPr/>
+        </p:nvSpPr>
+        <p:spPr>
+          <a:xfrm xmlns:a="http://schemas.openxmlformats.org/drawingml/2006/main">
+            <a:off x="504000" y="558000"/>
+            <a:ext cx="11088000" cy="612000"/>
+          </a:xfrm>
+          <a:prstGeom xmlns:a="http://schemas.openxmlformats.org/drawingml/2006/main" prst="rect">
+            <a:avLst/>
+          </a:prstGeom>
+        </p:spPr>
+        <p:txBody>
+          <a:bodyPr xmlns:a="http://schemas.openxmlformats.org/drawingml/2006/main"/>
+          <a:lstStyle xmlns:a="http://schemas.openxmlformats.org/drawingml/2006/main"/>
+          <a:p xmlns:a="http://schemas.openxmlformats.org/drawingml/2006/main">
+            <a:r>
+              <a:rPr lang="en-US" sz="2800" b="1">
+                <a:solidFill>
+                  <a:srgbClr val="1A202C"/>
+                </a:solidFill>
+                <a:latin typeface="Calibri"/>
+                <a:ea typeface="Calibri"/>
+              </a:rPr>
+              <a:t>Situation &amp; decision card</a:t>
+            </a:r>
+          </a:p>
+        </p:txBody>
+      </p:sp>
+      <p:sp>
+        <p:nvSpPr>
+          <p:cNvPr id="100011" name="TextBox 3"/>
+          <p:cNvSpPr txBox="1"/>
+          <p:nvPr/>
+        </p:nvSpPr>
+        <p:spPr>
+          <a:xfrm xmlns:a="http://schemas.openxmlformats.org/drawingml/2006/main">
+            <a:off x="504000" y="1224000"/>
+            <a:ext cx="11088000" cy="4968000"/>
+          </a:xfrm>
+          <a:prstGeom xmlns:a="http://schemas.openxmlformats.org/drawingml/2006/main" prst="rect">
+            <a:avLst/>
+          </a:prstGeom>
+          <a:solidFill xmlns:a="http://schemas.openxmlformats.org/drawingml/2006/main">
+            <a:srgbClr val="FFFFFF"/>
+          </a:solidFill>
+        </p:spPr>
+        <p:txBody>
+          <a:bodyPr xmlns:a="http://schemas.openxmlformats.org/drawingml/2006/main"/>
+          <a:lstStyle xmlns:a="http://schemas.openxmlformats.org/drawingml/2006/main"/>
+          <a:p xmlns:a="http://schemas.openxmlformats.org/drawingml/2006/main">
+            <a:r>
+              <a:rPr lang="en-US" sz="1300" b="0">
+                <a:solidFill>
+                  <a:srgbClr val="1A202C"/>
+                </a:solidFill>
+                <a:latin typeface="Calibri"/>
+                <a:ea typeface="Calibri"/>
+              </a:rPr>
+              <a:t>Presenter: Alex Chen — EM, Atlas (with farm utilization data)</a:t>
+            </a:r>
+          </a:p>
+          <a:p xmlns:a="http://schemas.openxmlformats.org/drawingml/2006/main">
+            <a:r>
+              <a:rPr lang="en-US" sz="1300" b="0">
+                <a:solidFill>
+                  <a:srgbClr val="1A202C"/>
+                </a:solidFill>
+                <a:latin typeface="Calibri"/>
+                <a:ea typeface="Calibri"/>
+              </a:rPr>
+              <a:t>Decision-maker: Morgan Lee + Finance (seat budget)</a:t>
+            </a:r>
+          </a:p>
+          <a:p xmlns:a="http://schemas.openxmlformats.org/drawingml/2006/main">
+            <a:r>
+              <a:rPr lang="en-US" sz="1300" b="0">
+                <a:solidFill>
+                  <a:srgbClr val="1A202C"/>
+                </a:solidFill>
+                <a:latin typeface="Calibri"/>
+                <a:ea typeface="Calibri"/>
+              </a:rPr>
+              <a:t>Audience: VP Eng, finance partner, program leads sharing the farm</a:t>
+            </a:r>
+          </a:p>
+          <a:p xmlns:a="http://schemas.openxmlformats.org/drawingml/2006/main">
+            <a:r>
+              <a:rPr lang="en-US" sz="1300" b="0">
+                <a:solidFill>
+                  <a:srgbClr val="1A202C"/>
+                </a:solidFill>
+                <a:latin typeface="Calibri"/>
+                <a:ea typeface="Calibri"/>
+              </a:rPr>
+              <a:t/>
+            </a:r>
+          </a:p>
+          <a:p xmlns:a="http://schemas.openxmlformats.org/drawingml/2006/main">
+            <a:r>
+              <a:rPr lang="en-US" sz="1300" b="0">
+                <a:solidFill>
+                  <a:srgbClr val="1A202C"/>
+                </a:solidFill>
+                <a:latin typeface="Calibri"/>
+                <a:ea typeface="Calibri"/>
+              </a:rPr>
+              <a:t>What just happened / context:</a:t>
+            </a:r>
+          </a:p>
+          <a:p xmlns:a="http://schemas.openxmlformats.org/drawingml/2006/main">
+            <a:r>
+              <a:rPr lang="en-US" sz="1300" b="0">
+                <a:solidFill>
+                  <a:srgbClr val="1A202C"/>
+                </a:solidFill>
+                <a:latin typeface="Calibri"/>
+                <a:ea typeface="Calibri"/>
+              </a:rPr>
+              <a:t>Shared DV farm has run ~2 quarters. Median regression 18h→6h. Pre-silicon farm loops helped catch DDR training bug before A0. Deck presented ~2026-05-25 AFTER freeze 4/10 and day-3 boot 5/15 (lagging KPIs already real).</a:t>
+            </a:r>
+          </a:p>
+          <a:p xmlns:a="http://schemas.openxmlformats.org/drawingml/2006/main">
+            <a:r>
+              <a:rPr lang="en-US" sz="1300" b="0">
+                <a:solidFill>
+                  <a:srgbClr val="1A202C"/>
+                </a:solidFill>
+                <a:latin typeface="Calibri"/>
+                <a:ea typeface="Calibri"/>
+              </a:rPr>
+              <a:t/>
+            </a:r>
+          </a:p>
+          <a:p xmlns:a="http://schemas.openxmlformats.org/drawingml/2006/main">
+            <a:r>
+              <a:rPr lang="en-US" sz="1300" b="0">
+                <a:solidFill>
+                  <a:srgbClr val="1A202C"/>
+                </a:solidFill>
+                <a:latin typeface="Calibri"/>
+                <a:ea typeface="Calibri"/>
+              </a:rPr>
+              <a:t>Stakes if we get this wrong:</a:t>
+            </a:r>
+          </a:p>
+          <a:p xmlns:a="http://schemas.openxmlformats.org/drawingml/2006/main">
+            <a:r>
+              <a:rPr lang="en-US" sz="1300" b="0">
+                <a:solidFill>
+                  <a:srgbClr val="1A202C"/>
+                </a:solidFill>
+                <a:latin typeface="Calibri"/>
+                <a:ea typeface="Calibri"/>
+              </a:rPr>
+              <a:t>H2 multi-program load (Aurora revB + WiFi IP) will re-queue the farm without +20 seats; freeze-class slips return.</a:t>
+            </a:r>
+          </a:p>
+          <a:p xmlns:a="http://schemas.openxmlformats.org/drawingml/2006/main">
+            <a:r>
+              <a:rPr lang="en-US" sz="1300" b="0">
+                <a:solidFill>
+                  <a:srgbClr val="1A202C"/>
+                </a:solidFill>
+                <a:latin typeface="Calibri"/>
+                <a:ea typeface="Calibri"/>
+              </a:rPr>
+              <a:t/>
+            </a:r>
+          </a:p>
+          <a:p xmlns:a="http://schemas.openxmlformats.org/drawingml/2006/main">
+            <a:r>
+              <a:rPr lang="en-US" sz="1300" b="0">
+                <a:solidFill>
+                  <a:srgbClr val="1A202C"/>
+                </a:solidFill>
+                <a:latin typeface="Calibri"/>
+                <a:ea typeface="Calibri"/>
+              </a:rPr>
+              <a:t>Decision needed:</a:t>
+            </a:r>
+          </a:p>
+          <a:p xmlns:a="http://schemas.openxmlformats.org/drawingml/2006/main">
+            <a:r>
+              <a:rPr lang="en-US" sz="1300" b="0">
+                <a:solidFill>
+                  <a:srgbClr val="1A202C"/>
+                </a:solidFill>
+                <a:latin typeface="Calibri"/>
+                <a:ea typeface="Calibri"/>
+              </a:rPr>
+              <a:t>Continue only vs Expand +20 seats (REC) vs shrink.</a:t>
+            </a:r>
+          </a:p>
+          <a:p xmlns:a="http://schemas.openxmlformats.org/drawingml/2006/main">
+            <a:r>
+              <a:rPr lang="en-US" sz="1300" b="0">
+                <a:solidFill>
+                  <a:srgbClr val="1A202C"/>
+                </a:solidFill>
+                <a:latin typeface="Calibri"/>
+                <a:ea typeface="Calibri"/>
+              </a:rPr>
+              <a:t/>
+            </a:r>
+          </a:p>
+          <a:p xmlns:a="http://schemas.openxmlformats.org/drawingml/2006/main">
+            <a:r>
+              <a:rPr lang="en-US" sz="1300" b="0">
+                <a:solidFill>
+                  <a:srgbClr val="1A202C"/>
+                </a:solidFill>
+                <a:latin typeface="Calibri"/>
+                <a:ea typeface="Calibri"/>
+              </a:rPr>
+              <a:t>Recommendation: EXPAND +20 seats; ~5-month payback envelope on avoided spin risk (assumptions labeled).</a:t>
+            </a:r>
+          </a:p>
+          <a:p xmlns:a="http://schemas.openxmlformats.org/drawingml/2006/main">
+            <a:r>
+              <a:rPr lang="en-US" sz="1300" b="0">
+                <a:solidFill>
+                  <a:srgbClr val="1A202C"/>
+                </a:solidFill>
+                <a:latin typeface="Calibri"/>
+                <a:ea typeface="Calibri"/>
+              </a:rPr>
+              <a:t>If YES: PO path with deck 05 HelixSim seats; H2 capacity honest.</a:t>
+            </a:r>
+          </a:p>
+          <a:p xmlns:a="http://schemas.openxmlformats.org/drawingml/2006/main">
+            <a:r>
+              <a:rPr lang="en-US" sz="1300" b="0">
+                <a:solidFill>
+                  <a:srgbClr val="1A202C"/>
+                </a:solidFill>
+                <a:latin typeface="Calibri"/>
+                <a:ea typeface="Calibri"/>
+              </a:rPr>
+              <a:t>If NO / delay: Queue wait spikes in H2; sample/revB compete for sim slots.</a:t>
+            </a:r>
+          </a:p>
+          <a:p xmlns:a="http://schemas.openxmlformats.org/drawingml/2006/main">
+            <a:r>
+              <a:rPr lang="en-US" sz="1300" b="0">
+                <a:solidFill>
+                  <a:srgbClr val="1A202C"/>
+                </a:solidFill>
+                <a:latin typeface="Calibri"/>
+                <a:ea typeface="Calibri"/>
+              </a:rPr>
+              <a:t/>
+            </a:r>
+          </a:p>
+          <a:p xmlns:a="http://schemas.openxmlformats.org/drawingml/2006/main">
+            <a:r>
+              <a:rPr lang="en-US" sz="1300" b="0">
+                <a:solidFill>
+                  <a:srgbClr val="1A202C"/>
+                </a:solidFill>
+                <a:latin typeface="Calibri"/>
+                <a:ea typeface="Calibri"/>
+              </a:rPr>
+              <a:t>Decide by: 2026-05-30 finance window</a:t>
+            </a:r>
+          </a:p>
+          <a:p xmlns:a="http://schemas.openxmlformats.org/drawingml/2006/main">
+            <a:r>
+              <a:rPr lang="en-US" sz="1300" b="0">
+                <a:solidFill>
+                  <a:srgbClr val="1A202C"/>
+                </a:solidFill>
+                <a:latin typeface="Calibri"/>
+                <a:ea typeface="Calibri"/>
+              </a:rPr>
+              <a:t>Arc prior: 02 silicon success used farm; 01 freeze held partly due to faster regressions</a:t>
+            </a:r>
+          </a:p>
+          <a:p xmlns:a="http://schemas.openxmlformats.org/drawingml/2006/main">
+            <a:r>
+              <a:rPr lang="en-US" sz="1300" b="0">
+                <a:solidFill>
+                  <a:srgbClr val="1A202C"/>
+                </a:solidFill>
+                <a:latin typeface="Calibri"/>
+                <a:ea typeface="Calibri"/>
+              </a:rPr>
+              <a:t>Arc next: 05 procurement renews/expands sim licenses to match seats</a:t>
+            </a:r>
+          </a:p>
+        </p:txBody>
+      </p:sp>
+      <p:sp>
+        <p:nvSpPr>
+          <p:cNvPr id="100012" name="TextBox 4"/>
+          <p:cNvSpPr txBox="1"/>
+          <p:nvPr/>
+        </p:nvSpPr>
+        <p:spPr>
+          <a:xfrm xmlns:a="http://schemas.openxmlformats.org/drawingml/2006/main">
+            <a:off x="504000" y="6426000"/>
+            <a:ext cx="11088000" cy="306000"/>
+          </a:xfrm>
+          <a:prstGeom xmlns:a="http://schemas.openxmlformats.org/drawingml/2006/main" prst="rect">
+            <a:avLst/>
+          </a:prstGeom>
+        </p:spPr>
+        <p:txBody>
+          <a:bodyPr xmlns:a="http://schemas.openxmlformats.org/drawingml/2006/main"/>
+          <a:lstStyle xmlns:a="http://schemas.openxmlformats.org/drawingml/2006/main"/>
+          <a:p xmlns:a="http://schemas.openxmlformats.org/drawingml/2006/main">
+            <a:r>
+              <a:rPr lang="en-US" sz="1100" b="0">
+                <a:solidFill>
+                  <a:srgbClr val="718096"/>
+                </a:solidFill>
+                <a:latin typeface="Calibri"/>
+                <a:ea typeface="Calibri"/>
+              </a:rPr>
+              <a:t>Atlas Platform  ·  Project Aurora  ·  NovaSemi  ·  2026</a:t>
+            </a:r>
+          </a:p>
+        </p:txBody>
+      </p:sp>
+    </p:spTree>
+  </p:cSld>
+</p:sld>
+</file>
+
+<file path=ppt/slides/slide4.xml><?xml version="1.0" encoding="utf-8"?>
+<p:sld xmlns:p="http://schemas.openxmlformats.org/presentationml/2006/main">
   <p:cSld name="BLUF — continue farm; expand +20 seats">
     <p:bg>
       <p:bgPr>
@@ -1676,7 +2113,7 @@
       <p:grpSpPr/>
       <p:sp>
         <p:nvSpPr>
-          <p:cNvPr id="100009" name="TextBox 1"/>
+          <p:cNvPr id="100013" name="TextBox 1"/>
           <p:cNvSpPr txBox="1"/>
           <p:nvPr/>
         </p:nvSpPr>
@@ -1708,7 +2145,7 @@
       </p:sp>
       <p:sp>
         <p:nvSpPr>
-          <p:cNvPr id="100010" name="TextBox 2"/>
+          <p:cNvPr id="100014" name="TextBox 2"/>
           <p:cNvSpPr txBox="1"/>
           <p:nvPr/>
         </p:nvSpPr>
@@ -1740,7 +2177,7 @@
       </p:sp>
       <p:sp>
         <p:nvSpPr>
-          <p:cNvPr id="100011" name="TextBox 3"/>
+          <p:cNvPr id="100015" name="TextBox 3"/>
           <p:cNvSpPr txBox="1"/>
           <p:nvPr/>
         </p:nvSpPr>
@@ -1775,7 +2212,7 @@
       </p:sp>
       <p:sp>
         <p:nvSpPr>
-          <p:cNvPr id="100012" name="TextBox 4"/>
+          <p:cNvPr id="100016" name="TextBox 4"/>
           <p:cNvSpPr txBox="1"/>
           <p:nvPr/>
         </p:nvSpPr>
@@ -1882,7 +2319,7 @@
       </p:sp>
       <p:sp>
         <p:nvSpPr>
-          <p:cNvPr id="100013" name="TextBox 5"/>
+          <p:cNvPr id="100017" name="TextBox 5"/>
           <p:cNvSpPr txBox="1"/>
           <p:nvPr/>
         </p:nvSpPr>
@@ -1917,7 +2354,7 @@
 </p:sld>
 </file>
 
-<file path=ppt/slides/slide4.xml><?xml version="1.0" encoding="utf-8"?>
+<file path=ppt/slides/slide5.xml><?xml version="1.0" encoding="utf-8"?>
 <p:sld xmlns:p="http://schemas.openxmlformats.org/presentationml/2006/main">
   <p:cSld name="Business problem attacked">
     <p:bg>
@@ -1936,7 +2373,7 @@
       <p:grpSpPr/>
       <p:sp>
         <p:nvSpPr>
-          <p:cNvPr id="100014" name="TextBox 1"/>
+          <p:cNvPr id="100018" name="TextBox 1"/>
           <p:cNvSpPr txBox="1"/>
           <p:nvPr/>
         </p:nvSpPr>
@@ -1968,7 +2405,7 @@
       </p:sp>
       <p:sp>
         <p:nvSpPr>
-          <p:cNvPr id="100015" name="TextBox 2"/>
+          <p:cNvPr id="100019" name="TextBox 2"/>
           <p:cNvSpPr txBox="1"/>
           <p:nvPr/>
         </p:nvSpPr>
@@ -2027,7 +2464,7 @@
       </p:sp>
       <p:sp>
         <p:nvSpPr>
-          <p:cNvPr id="100016" name="TextBox 3"/>
+          <p:cNvPr id="100020" name="TextBox 3"/>
           <p:cNvSpPr txBox="1"/>
           <p:nvPr/>
         </p:nvSpPr>
@@ -2062,7 +2499,7 @@
 </p:sld>
 </file>
 
-<file path=ppt/slides/slide5.xml><?xml version="1.0" encoding="utf-8"?>
+<file path=ppt/slides/slide6.xml><?xml version="1.0" encoding="utf-8"?>
 <p:sld xmlns:p="http://schemas.openxmlformats.org/presentationml/2006/main">
   <p:cSld name="Impact chain">
     <p:bg>
@@ -2081,7 +2518,7 @@
       <p:grpSpPr/>
       <p:sp>
         <p:nvSpPr>
-          <p:cNvPr id="100017" name="TextBox 1"/>
+          <p:cNvPr id="100021" name="TextBox 1"/>
           <p:cNvSpPr txBox="1"/>
           <p:nvPr/>
         </p:nvSpPr>
@@ -2113,7 +2550,7 @@
       </p:sp>
       <p:sp>
         <p:nvSpPr>
-          <p:cNvPr id="100018" name="TextBox 2"/>
+          <p:cNvPr id="100022" name="TextBox 2"/>
           <p:cNvSpPr txBox="1"/>
           <p:nvPr/>
         </p:nvSpPr>
@@ -2184,7 +2621,7 @@
       </p:sp>
       <p:sp>
         <p:nvSpPr>
-          <p:cNvPr id="100019" name="TextBox 3"/>
+          <p:cNvPr id="100023" name="TextBox 3"/>
           <p:cNvSpPr txBox="1"/>
           <p:nvPr/>
         </p:nvSpPr>
@@ -2219,7 +2656,7 @@
 </p:sld>
 </file>
 
-<file path=ppt/slides/slide6.xml><?xml version="1.0" encoding="utf-8"?>
+<file path=ppt/slides/slide7.xml><?xml version="1.0" encoding="utf-8"?>
 <p:sld xmlns:p="http://schemas.openxmlformats.org/presentationml/2006/main">
   <p:cSld name="Counterfactual &amp; what we will not claim">
     <p:bg>
@@ -2238,7 +2675,7 @@
       <p:grpSpPr/>
       <p:sp>
         <p:nvSpPr>
-          <p:cNvPr id="100020" name="TextBox 1"/>
+          <p:cNvPr id="100024" name="TextBox 1"/>
           <p:cNvSpPr txBox="1"/>
           <p:nvPr/>
         </p:nvSpPr>
@@ -2270,7 +2707,7 @@
       </p:sp>
       <p:sp>
         <p:nvSpPr>
-          <p:cNvPr id="100021" name="TextBox 2"/>
+          <p:cNvPr id="100025" name="TextBox 2"/>
           <p:cNvSpPr txBox="1"/>
           <p:nvPr/>
         </p:nvSpPr>
@@ -2329,7 +2766,7 @@
       </p:sp>
       <p:sp>
         <p:nvSpPr>
-          <p:cNvPr id="100022" name="TextBox 3"/>
+          <p:cNvPr id="100026" name="TextBox 3"/>
           <p:cNvSpPr txBox="1"/>
           <p:nvPr/>
         </p:nvSpPr>
@@ -2364,7 +2801,7 @@
 </p:sld>
 </file>
 
-<file path=ppt/slides/slide7.xml><?xml version="1.0" encoding="utf-8"?>
+<file path=ppt/slides/slide8.xml><?xml version="1.0" encoding="utf-8"?>
 <p:sld xmlns:p="http://schemas.openxmlformats.org/presentationml/2006/main">
   <p:cSld name="Options &amp; recommendation">
     <p:bg>
@@ -2383,7 +2820,7 @@
       <p:grpSpPr/>
       <p:sp>
         <p:nvSpPr>
-          <p:cNvPr id="100023" name="TextBox 1"/>
+          <p:cNvPr id="100027" name="TextBox 1"/>
           <p:cNvSpPr txBox="1"/>
           <p:nvPr/>
         </p:nvSpPr>
@@ -2415,7 +2852,7 @@
       </p:sp>
       <p:sp>
         <p:nvSpPr>
-          <p:cNvPr id="100024" name="TextBox 2"/>
+          <p:cNvPr id="100028" name="TextBox 2"/>
           <p:cNvSpPr txBox="1"/>
           <p:nvPr/>
         </p:nvSpPr>
@@ -2447,7 +2884,7 @@
       </p:sp>
       <p:graphicFrame>
         <p:nvGraphicFramePr>
-          <p:cNvPr id="100025" name="Table 1"/>
+          <p:cNvPr id="100029" name="Table 1"/>
           <p:cNvGraphicFramePr/>
           <p:nvPr/>
         </p:nvGraphicFramePr>
@@ -2847,7 +3284,7 @@
       </p:graphicFrame>
       <p:sp>
         <p:nvSpPr>
-          <p:cNvPr id="100026" name="TextBox 3"/>
+          <p:cNvPr id="100030" name="TextBox 3"/>
           <p:cNvSpPr txBox="1"/>
           <p:nvPr/>
         </p:nvSpPr>
@@ -2882,7 +3319,7 @@
 </p:sld>
 </file>
 
-<file path=ppt/slides/slide8.xml><?xml version="1.0" encoding="utf-8"?>
+<file path=ppt/slides/slide9.xml><?xml version="1.0" encoding="utf-8"?>
 <p:sld xmlns:p="http://schemas.openxmlformats.org/presentationml/2006/main">
   <p:cSld name="Decision &amp; ask">
     <p:bg>
@@ -2901,7 +3338,7 @@
       <p:grpSpPr/>
       <p:sp>
         <p:nvSpPr>
-          <p:cNvPr id="100027" name="TextBox 1"/>
+          <p:cNvPr id="100031" name="TextBox 1"/>
           <p:cNvSpPr txBox="1"/>
           <p:nvPr/>
         </p:nvSpPr>
@@ -2933,7 +3370,7 @@
       </p:sp>
       <p:sp>
         <p:nvSpPr>
-          <p:cNvPr id="100028" name="TextBox 2"/>
+          <p:cNvPr id="100032" name="TextBox 2"/>
           <p:cNvSpPr txBox="1"/>
           <p:nvPr/>
         </p:nvSpPr>
@@ -2965,7 +3402,7 @@
       </p:sp>
       <p:sp>
         <p:nvSpPr>
-          <p:cNvPr id="100029" name="TextBox 3"/>
+          <p:cNvPr id="100033" name="TextBox 3"/>
           <p:cNvSpPr txBox="1"/>
           <p:nvPr/>
         </p:nvSpPr>
@@ -3048,7 +3485,7 @@
       </p:sp>
       <p:sp>
         <p:nvSpPr>
-          <p:cNvPr id="100030" name="TextBox 4"/>
+          <p:cNvPr id="100034" name="TextBox 4"/>
           <p:cNvSpPr txBox="1"/>
           <p:nvPr/>
         </p:nvSpPr>

--- a/skills/presentations/assets/pptx/examples/04-benefit-value.pptx
+++ b/skills/presentations/assets/pptx/examples/04-benefit-value.pptx
@@ -5,18 +5,18 @@
     <p:sldMasterId xmlns:r="http://schemas.openxmlformats.org/officeDocument/2006/relationships" id="2147483648" r:id="rId1"/>
   </p:sldMasterIdLst>
   <p:notesMasterIdLst>
-    <p:notesMasterId r:id="Rf1832291ccf041fc"/>
+    <p:notesMasterId r:id="R47ef6cbc30dc40c8"/>
   </p:notesMasterIdLst>
   <p:sldIdLst>
-    <p:sldId id="256" r:id="R5f52c06d4fbd47bc"/>
-    <p:sldId id="257" r:id="R5b37565555104dbc"/>
-    <p:sldId id="258" r:id="Rab5ccdbcb09646c7"/>
-    <p:sldId id="259" r:id="R92c8ba5d257f4004"/>
-    <p:sldId id="260" r:id="Rb483abbe16714812"/>
-    <p:sldId id="261" r:id="Rf2552359dbe24a3a"/>
-    <p:sldId id="262" r:id="R3b88ca8e3a9f49e0"/>
-    <p:sldId id="263" r:id="Rd69369e25b6445e1"/>
-    <p:sldId id="264" r:id="R5ebb5adebfce4657"/>
+    <p:sldId id="256" r:id="R7b5024cd8de6455a"/>
+    <p:sldId id="257" r:id="R468862e77c7942b8"/>
+    <p:sldId id="258" r:id="R1edb7e7de0034966"/>
+    <p:sldId id="259" r:id="R911f998943af4f1a"/>
+    <p:sldId id="260" r:id="Rd72ab90fc1cf4cc1"/>
+    <p:sldId id="261" r:id="R1cb08d12ff464747"/>
+    <p:sldId id="262" r:id="R780674fd7a5742b7"/>
+    <p:sldId id="263" r:id="R1ff23d3c73484bce"/>
+    <p:sldId id="264" r:id="R05cffe0bec83447d"/>
   </p:sldIdLst>
   <p:sldSz cx="12192000" cy="6858000"/>
   <p:notesSz cx="6858000" cy="9144000"/>

--- a/skills/presentations/assets/pptx/examples/04-benefit-value.pptx
+++ b/skills/presentations/assets/pptx/examples/04-benefit-value.pptx
@@ -5,18 +5,18 @@
     <p:sldMasterId xmlns:r="http://schemas.openxmlformats.org/officeDocument/2006/relationships" id="2147483648" r:id="rId1"/>
   </p:sldMasterIdLst>
   <p:notesMasterIdLst>
-    <p:notesMasterId r:id="R47ef6cbc30dc40c8"/>
+    <p:notesMasterId r:id="Rb9a7f4840cae49da"/>
   </p:notesMasterIdLst>
   <p:sldIdLst>
-    <p:sldId id="256" r:id="R7b5024cd8de6455a"/>
-    <p:sldId id="257" r:id="R468862e77c7942b8"/>
-    <p:sldId id="258" r:id="R1edb7e7de0034966"/>
-    <p:sldId id="259" r:id="R911f998943af4f1a"/>
-    <p:sldId id="260" r:id="Rd72ab90fc1cf4cc1"/>
-    <p:sldId id="261" r:id="R1cb08d12ff464747"/>
-    <p:sldId id="262" r:id="R780674fd7a5742b7"/>
-    <p:sldId id="263" r:id="R1ff23d3c73484bce"/>
-    <p:sldId id="264" r:id="R05cffe0bec83447d"/>
+    <p:sldId id="256" r:id="Re75b44c50a474ec6"/>
+    <p:sldId id="257" r:id="R2bf8bf9ffe844a8a"/>
+    <p:sldId id="258" r:id="R6f8d725309764afe"/>
+    <p:sldId id="259" r:id="R5bd6f20e1a3d4b12"/>
+    <p:sldId id="260" r:id="R64ecf4ad07954e49"/>
+    <p:sldId id="261" r:id="Rd25431714ee34519"/>
+    <p:sldId id="262" r:id="Rc5a2140b72cb4476"/>
+    <p:sldId id="263" r:id="R1d46ea3500444fd0"/>
+    <p:sldId id="264" r:id="R07d343f89f4947e1"/>
   </p:sldIdLst>
   <p:sldSz cx="12192000" cy="6858000"/>
   <p:notesSz cx="6858000" cy="9144000"/>
@@ -1671,7 +1671,19 @@
                 <a:latin typeface="Calibri"/>
                 <a:ea typeface="Calibri"/>
               </a:rPr>
-              <a:t>In-repo: skills/presentations/classic-public-cases.md</a:t>
+              <a:t>CONTENT TEMPLATE ONLY — do not copy visual design (colors, margins, fonts) as a brand system.</a:t>
+            </a:r>
+          </a:p>
+          <a:p xmlns:a="http://schemas.openxmlformats.org/drawingml/2006/main">
+            <a:r>
+              <a:rPr lang="en-US" sz="1500" b="0">
+                <a:solidFill>
+                  <a:srgbClr val="1A202C"/>
+                </a:solidFill>
+                <a:latin typeface="Calibri"/>
+                <a:ea typeface="Calibri"/>
+              </a:rPr>
+              <a:t>In-repo: skills/presentations/classic-public-cases.md · assets/README.md (agent notice)</a:t>
             </a:r>
           </a:p>
         </p:txBody>
